--- a/VERTU-Template.pptx
+++ b/VERTU-Template.pptx
@@ -3004,11 +3004,11 @@
         <p:spPr>
           <a:xfrm>
             <a:off x="731520" y="2907792"/>
-            <a:ext cx="3466490" cy="1170432"/>
+            <a:ext cx="3466490" cy="914400"/>
           </a:xfrm>
           <a:prstGeom prst="roundRect">
             <a:avLst>
-              <a:gd name="adj" fmla="val 4688"/>
+              <a:gd name="adj" fmla="val 6000"/>
             </a:avLst>
           </a:prstGeom>
           <a:solidFill>
@@ -3032,8 +3032,8 @@
         </p:nvSpPr>
         <p:spPr>
           <a:xfrm>
-            <a:off x="950976" y="3044952"/>
-            <a:ext cx="3027578" cy="301752"/>
+            <a:off x="950976" y="3017520"/>
+            <a:ext cx="3027578" cy="237744"/>
           </a:xfrm>
           <a:prstGeom prst="rect">
             <a:avLst/>
@@ -3078,8 +3078,8 @@
         </p:nvSpPr>
         <p:spPr>
           <a:xfrm>
-            <a:off x="950976" y="3374136"/>
-            <a:ext cx="3027578" cy="530352"/>
+            <a:off x="950976" y="3273552"/>
+            <a:ext cx="3027578" cy="438912"/>
           </a:xfrm>
           <a:prstGeom prst="rect">
             <a:avLst/>
@@ -3118,11 +3118,11 @@
         <p:spPr>
           <a:xfrm>
             <a:off x="4454042" y="2907792"/>
-            <a:ext cx="3466490" cy="1170432"/>
+            <a:ext cx="3466490" cy="914400"/>
           </a:xfrm>
           <a:prstGeom prst="roundRect">
             <a:avLst>
-              <a:gd name="adj" fmla="val 4688"/>
+              <a:gd name="adj" fmla="val 6000"/>
             </a:avLst>
           </a:prstGeom>
           <a:solidFill>
@@ -3146,8 +3146,8 @@
         </p:nvSpPr>
         <p:spPr>
           <a:xfrm>
-            <a:off x="4673498" y="3044952"/>
-            <a:ext cx="3027578" cy="301752"/>
+            <a:off x="4673498" y="3017520"/>
+            <a:ext cx="3027578" cy="237744"/>
           </a:xfrm>
           <a:prstGeom prst="rect">
             <a:avLst/>
@@ -3192,8 +3192,8 @@
         </p:nvSpPr>
         <p:spPr>
           <a:xfrm>
-            <a:off x="4673498" y="3374136"/>
-            <a:ext cx="3027578" cy="530352"/>
+            <a:off x="4673498" y="3273552"/>
+            <a:ext cx="3027578" cy="438912"/>
           </a:xfrm>
           <a:prstGeom prst="rect">
             <a:avLst/>
@@ -3232,11 +3232,11 @@
         <p:spPr>
           <a:xfrm>
             <a:off x="8176565" y="2907792"/>
-            <a:ext cx="3466490" cy="1170432"/>
+            <a:ext cx="3466490" cy="914400"/>
           </a:xfrm>
           <a:prstGeom prst="roundRect">
             <a:avLst>
-              <a:gd name="adj" fmla="val 4688"/>
+              <a:gd name="adj" fmla="val 6000"/>
             </a:avLst>
           </a:prstGeom>
           <a:solidFill>
@@ -3260,8 +3260,8 @@
         </p:nvSpPr>
         <p:spPr>
           <a:xfrm>
-            <a:off x="8396021" y="3044952"/>
-            <a:ext cx="3027578" cy="301752"/>
+            <a:off x="8396021" y="3017520"/>
+            <a:ext cx="3027578" cy="237744"/>
           </a:xfrm>
           <a:prstGeom prst="rect">
             <a:avLst/>
@@ -3306,8 +3306,8 @@
         </p:nvSpPr>
         <p:spPr>
           <a:xfrm>
-            <a:off x="8396021" y="3374136"/>
-            <a:ext cx="3027578" cy="530352"/>
+            <a:off x="8396021" y="3273552"/>
+            <a:ext cx="3027578" cy="438912"/>
           </a:xfrm>
           <a:prstGeom prst="rect">
             <a:avLst/>
@@ -3345,12 +3345,12 @@
         </p:nvSpPr>
         <p:spPr>
           <a:xfrm>
-            <a:off x="731520" y="4334256"/>
-            <a:ext cx="3466490" cy="1170432"/>
+            <a:off x="731520" y="4078224"/>
+            <a:ext cx="3466490" cy="914400"/>
           </a:xfrm>
           <a:prstGeom prst="roundRect">
             <a:avLst>
-              <a:gd name="adj" fmla="val 4688"/>
+              <a:gd name="adj" fmla="val 6000"/>
             </a:avLst>
           </a:prstGeom>
           <a:solidFill>
@@ -3374,8 +3374,8 @@
         </p:nvSpPr>
         <p:spPr>
           <a:xfrm>
-            <a:off x="950976" y="4471416"/>
-            <a:ext cx="3027578" cy="301752"/>
+            <a:off x="950976" y="4187952"/>
+            <a:ext cx="3027578" cy="237744"/>
           </a:xfrm>
           <a:prstGeom prst="rect">
             <a:avLst/>
@@ -3420,8 +3420,8 @@
         </p:nvSpPr>
         <p:spPr>
           <a:xfrm>
-            <a:off x="950976" y="4800600"/>
-            <a:ext cx="3027578" cy="530352"/>
+            <a:off x="950976" y="4443984"/>
+            <a:ext cx="3027578" cy="438912"/>
           </a:xfrm>
           <a:prstGeom prst="rect">
             <a:avLst/>
@@ -3459,12 +3459,12 @@
         </p:nvSpPr>
         <p:spPr>
           <a:xfrm>
-            <a:off x="4454042" y="4334256"/>
-            <a:ext cx="3466490" cy="1170432"/>
+            <a:off x="4454042" y="4078224"/>
+            <a:ext cx="3466490" cy="914400"/>
           </a:xfrm>
           <a:prstGeom prst="roundRect">
             <a:avLst>
-              <a:gd name="adj" fmla="val 4688"/>
+              <a:gd name="adj" fmla="val 6000"/>
             </a:avLst>
           </a:prstGeom>
           <a:solidFill>
@@ -3488,8 +3488,8 @@
         </p:nvSpPr>
         <p:spPr>
           <a:xfrm>
-            <a:off x="4673498" y="4471416"/>
-            <a:ext cx="3027578" cy="301752"/>
+            <a:off x="4673498" y="4187952"/>
+            <a:ext cx="3027578" cy="237744"/>
           </a:xfrm>
           <a:prstGeom prst="rect">
             <a:avLst/>
@@ -3534,8 +3534,8 @@
         </p:nvSpPr>
         <p:spPr>
           <a:xfrm>
-            <a:off x="4673498" y="4800600"/>
-            <a:ext cx="3027578" cy="530352"/>
+            <a:off x="4673498" y="4443984"/>
+            <a:ext cx="3027578" cy="438912"/>
           </a:xfrm>
           <a:prstGeom prst="rect">
             <a:avLst/>
@@ -3573,12 +3573,12 @@
         </p:nvSpPr>
         <p:spPr>
           <a:xfrm>
-            <a:off x="8176565" y="4334256"/>
-            <a:ext cx="3466490" cy="1170432"/>
+            <a:off x="8176565" y="4078224"/>
+            <a:ext cx="3466490" cy="914400"/>
           </a:xfrm>
           <a:prstGeom prst="roundRect">
             <a:avLst>
-              <a:gd name="adj" fmla="val 4688"/>
+              <a:gd name="adj" fmla="val 6000"/>
             </a:avLst>
           </a:prstGeom>
           <a:solidFill>
@@ -3602,8 +3602,8 @@
         </p:nvSpPr>
         <p:spPr>
           <a:xfrm>
-            <a:off x="8396021" y="4471416"/>
-            <a:ext cx="3027578" cy="301752"/>
+            <a:off x="8396021" y="4187952"/>
+            <a:ext cx="3027578" cy="237744"/>
           </a:xfrm>
           <a:prstGeom prst="rect">
             <a:avLst/>
@@ -3648,8 +3648,8 @@
         </p:nvSpPr>
         <p:spPr>
           <a:xfrm>
-            <a:off x="8396021" y="4800600"/>
-            <a:ext cx="3027578" cy="530352"/>
+            <a:off x="8396021" y="4443984"/>
+            <a:ext cx="3027578" cy="438912"/>
           </a:xfrm>
           <a:prstGeom prst="rect">
             <a:avLst/>
@@ -3687,12 +3687,12 @@
         </p:nvSpPr>
         <p:spPr>
           <a:xfrm>
-            <a:off x="731520" y="5760720"/>
-            <a:ext cx="3466490" cy="1170432"/>
+            <a:off x="731520" y="5248656"/>
+            <a:ext cx="3466490" cy="914400"/>
           </a:xfrm>
           <a:prstGeom prst="roundRect">
             <a:avLst>
-              <a:gd name="adj" fmla="val 4688"/>
+              <a:gd name="adj" fmla="val 6000"/>
             </a:avLst>
           </a:prstGeom>
           <a:solidFill>
@@ -3716,8 +3716,8 @@
         </p:nvSpPr>
         <p:spPr>
           <a:xfrm>
-            <a:off x="950976" y="5897880"/>
-            <a:ext cx="3027578" cy="301752"/>
+            <a:off x="950976" y="5358384"/>
+            <a:ext cx="3027578" cy="237744"/>
           </a:xfrm>
           <a:prstGeom prst="rect">
             <a:avLst/>
@@ -3762,8 +3762,8 @@
         </p:nvSpPr>
         <p:spPr>
           <a:xfrm>
-            <a:off x="950976" y="6227064"/>
-            <a:ext cx="3027578" cy="530352"/>
+            <a:off x="950976" y="5614416"/>
+            <a:ext cx="3027578" cy="438912"/>
           </a:xfrm>
           <a:prstGeom prst="rect">
             <a:avLst/>
@@ -6462,12 +6462,12 @@
         </p:nvSpPr>
         <p:spPr>
           <a:xfrm>
-            <a:off x="731520" y="5742432"/>
-            <a:ext cx="10911535" cy="1097280"/>
+            <a:off x="731520" y="5486400"/>
+            <a:ext cx="10911535" cy="658368"/>
           </a:xfrm>
           <a:prstGeom prst="roundRect">
             <a:avLst>
-              <a:gd name="adj" fmla="val 5000"/>
+              <a:gd name="adj" fmla="val 8333"/>
             </a:avLst>
           </a:prstGeom>
           <a:solidFill>
@@ -6489,7 +6489,7 @@
         </p:nvSpPr>
         <p:spPr>
           <a:xfrm>
-            <a:off x="731520" y="6159398"/>
+            <a:off x="731520" y="5736580"/>
             <a:ext cx="10911535" cy="320040"/>
           </a:xfrm>
           <a:prstGeom prst="rect">
@@ -6528,7 +6528,7 @@
         </p:nvSpPr>
         <p:spPr>
           <a:xfrm>
-            <a:off x="731520" y="6570878"/>
+            <a:off x="731520" y="6148060"/>
             <a:ext cx="10911535" cy="411480"/>
           </a:xfrm>
           <a:prstGeom prst="rect">
@@ -7103,11 +7103,11 @@
         <p:spPr>
           <a:xfrm>
             <a:off x="7371106" y="2743200"/>
-            <a:ext cx="4271949" cy="3840480"/>
+            <a:ext cx="4271949" cy="2743200"/>
           </a:xfrm>
           <a:prstGeom prst="roundRect">
             <a:avLst>
-              <a:gd name="adj" fmla="val 1429"/>
+              <a:gd name="adj" fmla="val 2000"/>
             </a:avLst>
           </a:prstGeom>
           <a:solidFill>
@@ -7129,7 +7129,7 @@
         </p:nvSpPr>
         <p:spPr>
           <a:xfrm>
-            <a:off x="7371106" y="4202582"/>
+            <a:off x="7371106" y="3785616"/>
             <a:ext cx="4271949" cy="320040"/>
           </a:xfrm>
           <a:prstGeom prst="rect">
@@ -7168,7 +7168,7 @@
         </p:nvSpPr>
         <p:spPr>
           <a:xfrm>
-            <a:off x="7371106" y="4614062"/>
+            <a:off x="7371106" y="4197096"/>
             <a:ext cx="4271949" cy="411480"/>
           </a:xfrm>
           <a:prstGeom prst="rect">
